--- a/proposals/shinseisha/新生社様_省エネ創エネダブルプラン提案書.pptx
+++ b/proposals/shinseisha/新生社様_省エネ創エネダブルプラン提案書.pptx
@@ -310,13 +310,13 @@
                 <c:formatCode>General</c:formatCode>
                 <c:ptCount val="5"/>
                 <c:pt idx="0">
-                  <c:v>2439</c:v>
+                  <c:v>6584</c:v>
                 </c:pt>
                 <c:pt idx="1">
-                  <c:v>2439</c:v>
+                  <c:v>6584</c:v>
                 </c:pt>
                 <c:pt idx="2">
-                  <c:v>2439</c:v>
+                  <c:v>6584</c:v>
                 </c:pt>
                 <c:pt idx="3">
                   <c:v>0</c:v>
@@ -498,7 +498,7 @@
         <c:axId val="2094734552"/>
         <c:scaling>
           <c:orientation val="minMax"/>
-          <c:max val="9000"/>
+          <c:max val="13500"/>
           <c:min val="0"/>
         </c:scaling>
         <c:delete val="0"/>
@@ -4781,7 +4781,7 @@
                 <a:ea typeface="Noto Sans CJK JP" pitchFamily="34" charset="-122"/>
                 <a:cs typeface="Noto Sans CJK JP" pitchFamily="34" charset="-120"/>
               </a:rPr>
-              <a:t>昇降足場 (外壁単独)</a:t>
+              <a:t>全面足場 1,800 ㎡(3,000円/㎡)</a:t>
             </a:r>
             <a:endParaRPr lang="en-US" sz="1000" dirty="0"/>
           </a:p>
@@ -4820,7 +4820,7 @@
                 <a:ea typeface="Noto Sans CJK JP" pitchFamily="34" charset="-122"/>
                 <a:cs typeface="Noto Sans CJK JP" pitchFamily="34" charset="-120"/>
               </a:rPr>
-              <a:t>30 万円</a:t>
+              <a:t>540 万円</a:t>
             </a:r>
             <a:endParaRPr lang="en-US" sz="1100" dirty="0"/>
           </a:p>
@@ -4884,7 +4884,7 @@
                 <a:ea typeface="Noto Sans CJK JP" pitchFamily="34" charset="-122"/>
                 <a:cs typeface="Noto Sans CJK JP" pitchFamily="34" charset="-120"/>
               </a:rPr>
-              <a:t>― </a:t>
+              <a:t>― 屋根は20年耐候のため不要</a:t>
             </a:r>
             <a:endParaRPr lang="en-US" sz="1000" dirty="0"/>
           </a:p>
@@ -4987,7 +4987,7 @@
                 <a:ea typeface="Noto Sans CJK JP" pitchFamily="34" charset="-122"/>
                 <a:cs typeface="Noto Sans CJK JP" pitchFamily="34" charset="-120"/>
               </a:rPr>
-              <a:t>― </a:t>
+              <a:t>― 物価高騰の影響を回避</a:t>
             </a:r>
             <a:endParaRPr lang="en-US" sz="1000" dirty="0"/>
           </a:p>
@@ -5227,7 +5227,7 @@
                 <a:ea typeface="Noto Sans CJK JP" pitchFamily="34" charset="-122"/>
                 <a:cs typeface="Noto Sans CJK JP" pitchFamily="34" charset="-120"/>
               </a:rPr>
-              <a:t>1,350 万円</a:t>
+              <a:t>1,860 万円</a:t>
             </a:r>
             <a:endParaRPr lang="en-US" sz="1200" dirty="0"/>
           </a:p>
@@ -5330,7 +5330,7 @@
                 <a:ea typeface="Noto Sans CJK JP" pitchFamily="34" charset="-122"/>
                 <a:cs typeface="Noto Sans CJK JP" pitchFamily="34" charset="-120"/>
               </a:rPr>
-              <a:t>▲ 675 万円</a:t>
+              <a:t>▲ 930 万円</a:t>
             </a:r>
             <a:endParaRPr lang="en-US" sz="1100" dirty="0"/>
           </a:p>
@@ -5428,7 +5428,7 @@
                 <a:ea typeface="Noto Sans CJK JP" pitchFamily="34" charset="-122"/>
                 <a:cs typeface="Noto Sans CJK JP" pitchFamily="34" charset="-120"/>
               </a:rPr>
-              <a:t>675 万円</a:t>
+              <a:t>930 万円</a:t>
             </a:r>
             <a:endParaRPr lang="en-US" sz="1400" dirty="0"/>
           </a:p>
@@ -5487,7 +5487,7 @@
                 <a:ea typeface="Noto Sans CJK JP" pitchFamily="34" charset="-122"/>
                 <a:cs typeface="Noto Sans CJK JP" pitchFamily="34" charset="-120"/>
               </a:rPr>
-              <a:t>E プラン 2 年合計：実質投資 2,733 万円 (D 比 ▲840 万円) ／ 補助金 計 1,675 万円獲得 ／ 20 年累計 4,095 万円(A 比 ▲4,004 万円)</a:t>
+              <a:t>E プラン 2 年合計：実質投資 2,988 万円 (D 比 ▲585万) ／ 補助金 計 1,930 万円獲得 ／ 20 年累計 4,095 万円 (A 比 ▲8,149万)</a:t>
             </a:r>
             <a:endParaRPr lang="en-US" sz="1100" dirty="0"/>
           </a:p>
@@ -5837,7 +5837,7 @@
                 <a:ea typeface="Noto Sans CJK JP" pitchFamily="34" charset="-122"/>
                 <a:cs typeface="Noto Sans CJK JP" pitchFamily="34" charset="-120"/>
               </a:rPr>
-              <a:t>8,099 万円</a:t>
+              <a:t>12,244 万円</a:t>
             </a:r>
             <a:endParaRPr lang="en-US" sz="1600" dirty="0"/>
           </a:p>
@@ -5899,7 +5899,7 @@
                 <a:ea typeface="Noto Sans CJK JP" pitchFamily="34" charset="-122"/>
                 <a:cs typeface="Noto Sans CJK JP" pitchFamily="34" charset="-120"/>
               </a:rPr>
-              <a:t>└ メンテ 2,439</a:t>
+              <a:t>└ 塗装+足場 6,584★</a:t>
             </a:r>
             <a:endParaRPr lang="en-US" sz="900" dirty="0"/>
           </a:p>
@@ -6145,7 +6145,7 @@
                 <a:ea typeface="Noto Sans CJK JP" pitchFamily="34" charset="-122"/>
                 <a:cs typeface="Noto Sans CJK JP" pitchFamily="34" charset="-120"/>
               </a:rPr>
-              <a:t>6,810 万円</a:t>
+              <a:t>10,955 万円</a:t>
             </a:r>
             <a:endParaRPr lang="en-US" sz="1600" dirty="0"/>
           </a:p>
@@ -6207,7 +6207,7 @@
                 <a:ea typeface="Noto Sans CJK JP" pitchFamily="34" charset="-122"/>
                 <a:cs typeface="Noto Sans CJK JP" pitchFamily="34" charset="-120"/>
               </a:rPr>
-              <a:t>└ メンテ 2,439</a:t>
+              <a:t>└ 塗装+足場 6,584</a:t>
             </a:r>
             <a:endParaRPr lang="en-US" sz="900" dirty="0"/>
           </a:p>
@@ -6453,7 +6453,7 @@
                 <a:ea typeface="Noto Sans CJK JP" pitchFamily="34" charset="-122"/>
                 <a:cs typeface="Noto Sans CJK JP" pitchFamily="34" charset="-120"/>
               </a:rPr>
-              <a:t>5,676 万円</a:t>
+              <a:t>9,821 万円</a:t>
             </a:r>
             <a:endParaRPr lang="en-US" sz="1600" dirty="0"/>
           </a:p>
@@ -6515,7 +6515,7 @@
                 <a:ea typeface="Noto Sans CJK JP" pitchFamily="34" charset="-122"/>
                 <a:cs typeface="Noto Sans CJK JP" pitchFamily="34" charset="-120"/>
               </a:rPr>
-              <a:t>└ メンテ 2,439</a:t>
+              <a:t>└ 塗装+足場 6,584</a:t>
             </a:r>
             <a:endParaRPr lang="en-US" sz="900" dirty="0"/>
           </a:p>
@@ -6907,7 +6907,7 @@
                 <a:ea typeface="Noto Sans CJK JP" pitchFamily="34" charset="-122"/>
                 <a:cs typeface="Noto Sans CJK JP" pitchFamily="34" charset="-120"/>
               </a:rPr>
-              <a:t>▲ 2,724 万</a:t>
+              <a:t>▲ 6,869 万</a:t>
             </a:r>
             <a:endParaRPr lang="en-US" sz="950" dirty="0"/>
           </a:p>
@@ -7069,7 +7069,7 @@
                 <a:ea typeface="Noto Sans CJK JP" pitchFamily="34" charset="-122"/>
                 <a:cs typeface="Noto Sans CJK JP" pitchFamily="34" charset="-120"/>
               </a:rPr>
-              <a:t>4,095〜5,223万</a:t>
+              <a:t>4,095 万円★</a:t>
             </a:r>
             <a:endParaRPr lang="en-US" sz="1600" dirty="0"/>
           </a:p>
@@ -7131,7 +7131,7 @@
                 <a:ea typeface="Noto Sans CJK JP" pitchFamily="34" charset="-122"/>
                 <a:cs typeface="Noto Sans CJK JP" pitchFamily="34" charset="-120"/>
               </a:rPr>
-              <a:t>└ メンテ 0〜1,128</a:t>
+              <a:t>└ メンテ 0 ★</a:t>
             </a:r>
             <a:endParaRPr lang="en-US" sz="900" dirty="0"/>
           </a:p>
@@ -7215,7 +7215,7 @@
                 <a:ea typeface="Noto Sans CJK JP" pitchFamily="34" charset="-122"/>
                 <a:cs typeface="Noto Sans CJK JP" pitchFamily="34" charset="-120"/>
               </a:rPr>
-              <a:t>▲ 2,876〜4,004</a:t>
+              <a:t>▲ 8,149 万</a:t>
             </a:r>
             <a:endParaRPr lang="en-US" sz="950" dirty="0"/>
           </a:p>
@@ -7316,7 +7316,7 @@
                 <a:ea typeface="Noto Sans CJK JP" pitchFamily="34" charset="-122"/>
                 <a:cs typeface="Noto Sans CJK JP" pitchFamily="34" charset="-120"/>
               </a:rPr>
-              <a:t>理由：①窓断熱 + 屋根遮熱ポリウレアで空調電気代を 30% カット ②E案は屋根遮熱+創エネを今年実施、外壁は来年補助金で再チャレンジの2段階作戦 ③ 20 年塗装 + 足場 2,439 万円が不要 ④補助金 1,000 万円 ( 上限 ) で設備費圧縮、外壁ポリウレア化で資産価値も向上</a:t>
+              <a:t>理由：①窓断熱 + 屋根遮熱ポリウレアで空調電気代を 30% カット ②塗装+足場は20年で 6,584万かかる。 D/E案はポリウレアで20年メンテ0+遮熱で空調代も下がる ③ 20 年塗装 + 足場 2,439 万円が不要 ④補助金 1,000 万円 ( 上限 ) で設備費圧縮、外壁ポリウレア化で資産価値も向上</a:t>
             </a:r>
             <a:endParaRPr lang="en-US" sz="1000" dirty="0"/>
           </a:p>
@@ -7534,8 +7534,8 @@
         </p:nvSpPr>
         <p:spPr>
           <a:xfrm>
-            <a:off x="960120" y="2057400"/>
-            <a:ext cx="1143000" cy="384048"/>
+            <a:off x="868680" y="2029968"/>
+            <a:ext cx="1234440" cy="384048"/>
           </a:xfrm>
           <a:prstGeom prst="rect">
             <a:avLst/>
@@ -7554,8 +7554,8 @@
         </p:nvSpPr>
         <p:spPr>
           <a:xfrm>
-            <a:off x="960120" y="2057400"/>
-            <a:ext cx="1143000" cy="384048"/>
+            <a:off x="868680" y="2029968"/>
+            <a:ext cx="1234440" cy="384048"/>
           </a:xfrm>
           <a:prstGeom prst="rect">
             <a:avLst/>
@@ -7579,7 +7579,7 @@
                 <a:ea typeface="Noto Sans CJK JP" pitchFamily="34" charset="-122"/>
                 <a:cs typeface="Noto Sans CJK JP" pitchFamily="34" charset="-120"/>
               </a:rPr>
-              <a:t>8,099 万</a:t>
+              <a:t>12,244 万</a:t>
             </a:r>
             <a:endParaRPr lang="en-US" sz="1100" dirty="0"/>
           </a:p>
@@ -7593,8 +7593,8 @@
         </p:nvSpPr>
         <p:spPr>
           <a:xfrm>
-            <a:off x="2331720" y="2651760"/>
-            <a:ext cx="1143000" cy="384048"/>
+            <a:off x="2606040" y="2423160"/>
+            <a:ext cx="1234440" cy="384048"/>
           </a:xfrm>
           <a:prstGeom prst="rect">
             <a:avLst/>
@@ -7613,8 +7613,8 @@
         </p:nvSpPr>
         <p:spPr>
           <a:xfrm>
-            <a:off x="2331720" y="2651760"/>
-            <a:ext cx="1143000" cy="384048"/>
+            <a:off x="2606040" y="2423160"/>
+            <a:ext cx="1234440" cy="384048"/>
           </a:xfrm>
           <a:prstGeom prst="rect">
             <a:avLst/>
@@ -7638,7 +7638,7 @@
                 <a:ea typeface="Noto Sans CJK JP" pitchFamily="34" charset="-122"/>
                 <a:cs typeface="Noto Sans CJK JP" pitchFamily="34" charset="-120"/>
               </a:rPr>
-              <a:t>6,810 万</a:t>
+              <a:t>10,955 万</a:t>
             </a:r>
             <a:endParaRPr lang="en-US" sz="1100" dirty="0"/>
           </a:p>
@@ -7652,8 +7652,8 @@
         </p:nvSpPr>
         <p:spPr>
           <a:xfrm>
-            <a:off x="3703320" y="3163824"/>
-            <a:ext cx="1143000" cy="384048"/>
+            <a:off x="4343400" y="2770632"/>
+            <a:ext cx="1234440" cy="384048"/>
           </a:xfrm>
           <a:prstGeom prst="rect">
             <a:avLst/>
@@ -7672,8 +7672,8 @@
         </p:nvSpPr>
         <p:spPr>
           <a:xfrm>
-            <a:off x="3703320" y="3163824"/>
-            <a:ext cx="1143000" cy="384048"/>
+            <a:off x="4343400" y="2770632"/>
+            <a:ext cx="1234440" cy="384048"/>
           </a:xfrm>
           <a:prstGeom prst="rect">
             <a:avLst/>
@@ -7697,7 +7697,7 @@
                 <a:ea typeface="Noto Sans CJK JP" pitchFamily="34" charset="-122"/>
                 <a:cs typeface="Noto Sans CJK JP" pitchFamily="34" charset="-120"/>
               </a:rPr>
-              <a:t>5,676 万</a:t>
+              <a:t>9,821 万</a:t>
             </a:r>
             <a:endParaRPr lang="en-US" sz="1100" dirty="0"/>
           </a:p>
@@ -7711,8 +7711,8 @@
         </p:nvSpPr>
         <p:spPr>
           <a:xfrm>
-            <a:off x="5074920" y="3300984"/>
-            <a:ext cx="1143000" cy="384048"/>
+            <a:off x="6080760" y="4123944"/>
+            <a:ext cx="1234440" cy="384048"/>
           </a:xfrm>
           <a:prstGeom prst="rect">
             <a:avLst/>
@@ -7731,8 +7731,8 @@
         </p:nvSpPr>
         <p:spPr>
           <a:xfrm>
-            <a:off x="5074920" y="3300984"/>
-            <a:ext cx="1143000" cy="384048"/>
+            <a:off x="6080760" y="4123944"/>
+            <a:ext cx="1234440" cy="384048"/>
           </a:xfrm>
           <a:prstGeom prst="rect">
             <a:avLst/>
@@ -7770,8 +7770,8 @@
         </p:nvSpPr>
         <p:spPr>
           <a:xfrm>
-            <a:off x="6446520" y="3886200"/>
-            <a:ext cx="1143000" cy="384048"/>
+            <a:off x="7818120" y="4507992"/>
+            <a:ext cx="1234440" cy="384048"/>
           </a:xfrm>
           <a:prstGeom prst="rect">
             <a:avLst/>
@@ -7790,8 +7790,8 @@
         </p:nvSpPr>
         <p:spPr>
           <a:xfrm>
-            <a:off x="6446520" y="3886200"/>
-            <a:ext cx="1143000" cy="384048"/>
+            <a:off x="7818120" y="4507992"/>
+            <a:ext cx="1234440" cy="384048"/>
           </a:xfrm>
           <a:prstGeom prst="rect">
             <a:avLst/>
@@ -7829,7 +7829,7 @@
         </p:nvSpPr>
         <p:spPr>
           <a:xfrm>
-            <a:off x="6766560" y="3383280"/>
+            <a:off x="8183880" y="4005072"/>
             <a:ext cx="502920" cy="502920"/>
           </a:xfrm>
           <a:prstGeom prst="ellipse">
@@ -7849,7 +7849,7 @@
         </p:nvSpPr>
         <p:spPr>
           <a:xfrm>
-            <a:off x="6766560" y="3383280"/>
+            <a:off x="8183880" y="4005072"/>
             <a:ext cx="502920" cy="502920"/>
           </a:xfrm>
           <a:prstGeom prst="rect">
@@ -8309,7 +8309,7 @@
                 <a:ea typeface="Noto Sans CJK JP" pitchFamily="34" charset="-122"/>
                 <a:cs typeface="Noto Sans CJK JP" pitchFamily="34" charset="-120"/>
               </a:rPr>
-              <a:t>D が確定で最安。 E は来年外壁の補助金が通れば最安(▲4,004万)、通らなくても A比▲2,876万。2段階作戦が経営的に強い</a:t>
+              <a:t>D は確定で A比 ▲6,869 万。 E は来年外壁の補助金成功で最安 A比 ▲8,149 万。 ★A/B/C のオレンジ部分(塗装+足場)は暑さ対策にならず物価で雪だるま式に増える ／ D/E はポリウレアでメンテ0+遮熱二重効果★</a:t>
             </a:r>
             <a:endParaRPr lang="en-US" sz="1250" dirty="0"/>
           </a:p>
@@ -8497,7 +8497,7 @@
                 <a:ea typeface="Noto Sans CJK JP" pitchFamily="34" charset="-122"/>
                 <a:cs typeface="Noto Sans CJK JP" pitchFamily="34" charset="-120"/>
               </a:rPr>
-              <a:t>建物維持負担 ― 20 年で発生する隠れコスト</a:t>
+              <a:t>建物維持負担 ― 通常塗装は20年で6,584万円 ★暑さ対策にならない!</a:t>
             </a:r>
             <a:endParaRPr lang="en-US" sz="3000" dirty="0"/>
           </a:p>
@@ -8518,7 +8518,7 @@
             <a:avLst/>
           </a:prstGeom>
           <a:solidFill>
-            <a:srgbClr val="0F2747"/>
+            <a:srgbClr val="C0392B"/>
           </a:solidFill>
           <a:ln/>
         </p:spPr>
@@ -8548,15 +8548,54 @@
               <a:buNone/>
             </a:pPr>
             <a:r>
+              <a:rPr lang="en-US" sz="1350" b="1" dirty="0">
+                <a:solidFill>
+                  <a:srgbClr val="FFFFFF"/>
+                </a:solidFill>
+                <a:latin typeface="Noto Sans CJK JP" pitchFamily="34" charset="0"/>
+                <a:ea typeface="Noto Sans CJK JP" pitchFamily="34" charset="-122"/>
+                <a:cs typeface="Noto Sans CJK JP" pitchFamily="34" charset="-120"/>
+              </a:rPr>
+              <a:t>★ 塗装は維持費をかけても暑さ対策にならない! ／ 物価高騰6%/年で工事費は雪だるま式に上がる</a:t>
+            </a:r>
+            <a:endParaRPr lang="en-US" sz="1350" dirty="0"/>
+          </a:p>
+        </p:txBody>
+      </p:sp>
+      <p:sp>
+        <p:nvSpPr>
+          <p:cNvPr id="6" name="Text 4"/>
+          <p:cNvSpPr/>
+          <p:nvPr/>
+        </p:nvSpPr>
+        <p:spPr>
+          <a:xfrm>
+            <a:off x="457200" y="2103120"/>
+            <a:ext cx="9144000" cy="320040"/>
+          </a:xfrm>
+          <a:prstGeom prst="rect">
+            <a:avLst/>
+          </a:prstGeom>
+          <a:noFill/>
+          <a:ln/>
+        </p:spPr>
+        <p:txBody>
+          <a:bodyPr wrap="square" lIns="0" tIns="0" rIns="0" bIns="0" rtlCol="0" anchor="ctr"/>
+          <a:lstStyle/>
+          <a:p>
+            <a:pPr algn="l" indent="0" marL="0">
+              <a:buNone/>
+            </a:pPr>
+            <a:r>
               <a:rPr lang="en-US" sz="1300" b="1" dirty="0">
                 <a:solidFill>
-                  <a:srgbClr val="C7A867"/>
-                </a:solidFill>
-                <a:latin typeface="Noto Sans CJK JP" pitchFamily="34" charset="0"/>
-                <a:ea typeface="Noto Sans CJK JP" pitchFamily="34" charset="-122"/>
-                <a:cs typeface="Noto Sans CJK JP" pitchFamily="34" charset="-120"/>
-              </a:rPr>
-              <a:t>普通の建物管理だと、 20 年で「電気代」とは別に必ず発生する 3 つの工事費</a:t>
+                  <a:srgbClr val="1A2B40"/>
+                </a:solidFill>
+                <a:latin typeface="Noto Sans CJK JP" pitchFamily="34" charset="0"/>
+                <a:ea typeface="Noto Sans CJK JP" pitchFamily="34" charset="-122"/>
+                <a:cs typeface="Noto Sans CJK JP" pitchFamily="34" charset="-120"/>
+              </a:rPr>
+              <a:t>A ・ B ・ C 案 共通：通常塗装メンテ計画(20年で2回・物価6%/年複利)</a:t>
             </a:r>
             <a:endParaRPr lang="en-US" sz="1300" dirty="0"/>
           </a:p>
@@ -8564,52 +8603,13 @@
       </p:sp>
       <p:sp>
         <p:nvSpPr>
-          <p:cNvPr id="6" name="Text 4"/>
-          <p:cNvSpPr/>
-          <p:nvPr/>
-        </p:nvSpPr>
-        <p:spPr>
-          <a:xfrm>
-            <a:off x="457200" y="2148840"/>
-            <a:ext cx="7315200" cy="320040"/>
-          </a:xfrm>
-          <a:prstGeom prst="rect">
-            <a:avLst/>
-          </a:prstGeom>
-          <a:noFill/>
-          <a:ln/>
-        </p:spPr>
-        <p:txBody>
-          <a:bodyPr wrap="square" lIns="0" tIns="0" rIns="0" bIns="0" rtlCol="0" anchor="ctr"/>
-          <a:lstStyle/>
-          <a:p>
-            <a:pPr algn="l" indent="0" marL="0">
-              <a:buNone/>
-            </a:pPr>
-            <a:r>
-              <a:rPr lang="en-US" sz="1300" b="1" dirty="0">
-                <a:solidFill>
-                  <a:srgbClr val="1A2B40"/>
-                </a:solidFill>
-                <a:latin typeface="Noto Sans CJK JP" pitchFamily="34" charset="0"/>
-                <a:ea typeface="Noto Sans CJK JP" pitchFamily="34" charset="-122"/>
-                <a:cs typeface="Noto Sans CJK JP" pitchFamily="34" charset="-120"/>
-              </a:rPr>
-              <a:t>A ・ B ・ C 案 共通：建物メンテ計画（ 20 年）</a:t>
-            </a:r>
-            <a:endParaRPr lang="en-US" sz="1300" dirty="0"/>
-          </a:p>
-        </p:txBody>
-      </p:sp>
-      <p:sp>
-        <p:nvSpPr>
           <p:cNvPr id="7" name="Shape 5"/>
           <p:cNvSpPr/>
           <p:nvPr/>
         </p:nvSpPr>
         <p:spPr>
           <a:xfrm>
-            <a:off x="1188720" y="3108960"/>
+            <a:off x="1188720" y="3246120"/>
             <a:ext cx="9784080" cy="0"/>
           </a:xfrm>
           <a:prstGeom prst="line">
@@ -8632,7 +8632,7 @@
         </p:nvSpPr>
         <p:spPr>
           <a:xfrm>
-            <a:off x="914400" y="2514600"/>
+            <a:off x="914400" y="2651760"/>
             <a:ext cx="1828800" cy="274320"/>
           </a:xfrm>
           <a:prstGeom prst="rect">
@@ -8671,7 +8671,7 @@
         </p:nvSpPr>
         <p:spPr>
           <a:xfrm>
-            <a:off x="1664208" y="2944368"/>
+            <a:off x="1664208" y="3081528"/>
             <a:ext cx="329184" cy="329184"/>
           </a:xfrm>
           <a:prstGeom prst="ellipse">
@@ -8696,8 +8696,8 @@
         </p:nvSpPr>
         <p:spPr>
           <a:xfrm>
-            <a:off x="640080" y="3429000"/>
-            <a:ext cx="2377440" cy="320040"/>
+            <a:off x="640080" y="3566160"/>
+            <a:ext cx="2377440" cy="365760"/>
           </a:xfrm>
           <a:prstGeom prst="rect">
             <a:avLst/>
@@ -8713,7 +8713,7 @@
               <a:buNone/>
             </a:pPr>
             <a:r>
-              <a:rPr lang="en-US" sz="1600" b="1" dirty="0">
+              <a:rPr lang="en-US" sz="1700" b="1" dirty="0">
                 <a:solidFill>
                   <a:srgbClr val="6B7280"/>
                 </a:solidFill>
@@ -8723,7 +8723,7 @@
               </a:rPr>
               <a:t>─</a:t>
             </a:r>
-            <a:endParaRPr lang="en-US" sz="1600" dirty="0"/>
+            <a:endParaRPr lang="en-US" sz="1700" dirty="0"/>
           </a:p>
         </p:txBody>
       </p:sp>
@@ -8735,8 +8735,8 @@
         </p:nvSpPr>
         <p:spPr>
           <a:xfrm>
-            <a:off x="365760" y="3822192"/>
-            <a:ext cx="2926080" cy="457200"/>
+            <a:off x="274320" y="4005072"/>
+            <a:ext cx="3108960" cy="365760"/>
           </a:xfrm>
           <a:prstGeom prst="rect">
             <a:avLst/>
@@ -8755,7 +8755,7 @@
               <a:buNone/>
             </a:pPr>
             <a:r>
-              <a:rPr lang="en-US" sz="950" dirty="0">
+              <a:rPr lang="en-US" sz="900" dirty="0">
                 <a:solidFill>
                   <a:srgbClr val="6B7280"/>
                 </a:solidFill>
@@ -8763,9 +8763,9 @@
                 <a:ea typeface="Noto Sans CJK JP" pitchFamily="34" charset="-122"/>
                 <a:cs typeface="Noto Sans CJK JP" pitchFamily="34" charset="-120"/>
               </a:rPr>
-              <a:t>現状維持</a:t>
-            </a:r>
-            <a:endParaRPr lang="en-US" sz="950" dirty="0"/>
+              <a:t>1回現価 1,763 万円</a:t>
+            </a:r>
+            <a:endParaRPr lang="en-US" sz="900" dirty="0"/>
           </a:p>
         </p:txBody>
       </p:sp>
@@ -8777,7 +8777,7 @@
         </p:nvSpPr>
         <p:spPr>
           <a:xfrm>
-            <a:off x="4846320" y="2514600"/>
+            <a:off x="4846320" y="2651760"/>
             <a:ext cx="1828800" cy="274320"/>
           </a:xfrm>
           <a:prstGeom prst="rect">
@@ -8816,7 +8816,7 @@
         </p:nvSpPr>
         <p:spPr>
           <a:xfrm>
-            <a:off x="5596128" y="2944368"/>
+            <a:off x="5596128" y="3081528"/>
             <a:ext cx="329184" cy="329184"/>
           </a:xfrm>
           <a:prstGeom prst="ellipse">
@@ -8841,8 +8841,8 @@
         </p:nvSpPr>
         <p:spPr>
           <a:xfrm>
-            <a:off x="4572000" y="3429000"/>
-            <a:ext cx="2377440" cy="320040"/>
+            <a:off x="4572000" y="3566160"/>
+            <a:ext cx="2377440" cy="365760"/>
           </a:xfrm>
           <a:prstGeom prst="rect">
             <a:avLst/>
@@ -8858,7 +8858,7 @@
               <a:buNone/>
             </a:pPr>
             <a:r>
-              <a:rPr lang="en-US" sz="1600" b="1" dirty="0">
+              <a:rPr lang="en-US" sz="1700" b="1" dirty="0">
                 <a:solidFill>
                   <a:srgbClr val="E58027"/>
                 </a:solidFill>
@@ -8866,9 +8866,9 @@
                 <a:ea typeface="Noto Sans CJK JP" pitchFamily="34" charset="-122"/>
                 <a:cs typeface="Noto Sans CJK JP" pitchFamily="34" charset="-120"/>
               </a:rPr>
-              <a:t>▲ 874 万円</a:t>
-            </a:r>
-            <a:endParaRPr lang="en-US" sz="1600" dirty="0"/>
+              <a:t>▲ 2,359 万円</a:t>
+            </a:r>
+            <a:endParaRPr lang="en-US" sz="1700" dirty="0"/>
           </a:p>
         </p:txBody>
       </p:sp>
@@ -8880,8 +8880,8 @@
         </p:nvSpPr>
         <p:spPr>
           <a:xfrm>
-            <a:off x="4297680" y="3822192"/>
-            <a:ext cx="2926080" cy="457200"/>
+            <a:off x="4206240" y="4005072"/>
+            <a:ext cx="3108960" cy="365760"/>
           </a:xfrm>
           <a:prstGeom prst="rect">
             <a:avLst/>
@@ -8900,7 +8900,7 @@
               <a:buNone/>
             </a:pPr>
             <a:r>
-              <a:rPr lang="en-US" sz="950" dirty="0">
+              <a:rPr lang="en-US" sz="900" dirty="0">
                 <a:solidFill>
                   <a:srgbClr val="6B7280"/>
                 </a:solidFill>
@@ -8908,9 +8908,9 @@
                 <a:ea typeface="Noto Sans CJK JP" pitchFamily="34" charset="-122"/>
                 <a:cs typeface="Noto Sans CJK JP" pitchFamily="34" charset="-120"/>
               </a:rPr>
-              <a:t>屋根塗装 + 足場 + 脱着 ( 物価 6%/ 年高騰 )</a:t>
-            </a:r>
-            <a:endParaRPr lang="en-US" sz="950" dirty="0"/>
+              <a:t>塗装1,160+足場540+脱着63</a:t>
+            </a:r>
+            <a:endParaRPr lang="en-US" sz="900" dirty="0"/>
           </a:p>
         </p:txBody>
       </p:sp>
@@ -8922,7 +8922,7 @@
         </p:nvSpPr>
         <p:spPr>
           <a:xfrm>
-            <a:off x="8686800" y="2514600"/>
+            <a:off x="8686800" y="2651760"/>
             <a:ext cx="1828800" cy="274320"/>
           </a:xfrm>
           <a:prstGeom prst="rect">
@@ -8961,7 +8961,7 @@
         </p:nvSpPr>
         <p:spPr>
           <a:xfrm>
-            <a:off x="9436608" y="2944368"/>
+            <a:off x="9436608" y="3081528"/>
             <a:ext cx="329184" cy="329184"/>
           </a:xfrm>
           <a:prstGeom prst="ellipse">
@@ -8986,8 +8986,8 @@
         </p:nvSpPr>
         <p:spPr>
           <a:xfrm>
-            <a:off x="8412480" y="3429000"/>
-            <a:ext cx="2377440" cy="320040"/>
+            <a:off x="8412480" y="3566160"/>
+            <a:ext cx="2377440" cy="365760"/>
           </a:xfrm>
           <a:prstGeom prst="rect">
             <a:avLst/>
@@ -9003,7 +9003,7 @@
               <a:buNone/>
             </a:pPr>
             <a:r>
-              <a:rPr lang="en-US" sz="1600" b="1" dirty="0">
+              <a:rPr lang="en-US" sz="1700" b="1" dirty="0">
                 <a:solidFill>
                   <a:srgbClr val="C0392B"/>
                 </a:solidFill>
@@ -9011,9 +9011,9 @@
                 <a:ea typeface="Noto Sans CJK JP" pitchFamily="34" charset="-122"/>
                 <a:cs typeface="Noto Sans CJK JP" pitchFamily="34" charset="-120"/>
               </a:rPr>
-              <a:t>▲ 1,565 万円</a:t>
-            </a:r>
-            <a:endParaRPr lang="en-US" sz="1600" dirty="0"/>
+              <a:t>▲ 4,225 万円</a:t>
+            </a:r>
+            <a:endParaRPr lang="en-US" sz="1700" dirty="0"/>
           </a:p>
         </p:txBody>
       </p:sp>
@@ -9025,8 +9025,8 @@
         </p:nvSpPr>
         <p:spPr>
           <a:xfrm>
-            <a:off x="8138160" y="3822192"/>
-            <a:ext cx="2926080" cy="457200"/>
+            <a:off x="8046720" y="4005072"/>
+            <a:ext cx="3108960" cy="365760"/>
           </a:xfrm>
           <a:prstGeom prst="rect">
             <a:avLst/>
@@ -9045,7 +9045,7 @@
               <a:buNone/>
             </a:pPr>
             <a:r>
-              <a:rPr lang="en-US" sz="950" dirty="0">
+              <a:rPr lang="en-US" sz="900" dirty="0">
                 <a:solidFill>
                   <a:srgbClr val="6B7280"/>
                 </a:solidFill>
@@ -9053,9 +9053,9 @@
                 <a:ea typeface="Noto Sans CJK JP" pitchFamily="34" charset="-122"/>
                 <a:cs typeface="Noto Sans CJK JP" pitchFamily="34" charset="-120"/>
               </a:rPr>
-              <a:t>屋根塗装 + 足場 + 脱着 ( 物価高騰累積 )</a:t>
-            </a:r>
-            <a:endParaRPr lang="en-US" sz="950" dirty="0"/>
+              <a:t>物価高騰6%/年×15年累積</a:t>
+            </a:r>
+            <a:endParaRPr lang="en-US" sz="900" dirty="0"/>
           </a:p>
         </p:txBody>
       </p:sp>
@@ -9067,7 +9067,7 @@
         </p:nvSpPr>
         <p:spPr>
           <a:xfrm>
-            <a:off x="457200" y="4434840"/>
+            <a:off x="457200" y="4572000"/>
             <a:ext cx="11274552" cy="457200"/>
           </a:xfrm>
           <a:prstGeom prst="rect">
@@ -9092,7 +9092,7 @@
         </p:nvSpPr>
         <p:spPr>
           <a:xfrm>
-            <a:off x="640080" y="4434840"/>
+            <a:off x="640080" y="4572000"/>
             <a:ext cx="10972800" cy="457200"/>
           </a:xfrm>
           <a:prstGeom prst="rect">
@@ -9111,13 +9111,13 @@
             <a:r>
               <a:rPr lang="en-US" sz="1050" b="1" dirty="0">
                 <a:solidFill>
-                  <a:srgbClr val="C0392B"/>
-                </a:solidFill>
-                <a:latin typeface="Noto Sans CJK JP" pitchFamily="34" charset="0"/>
-                <a:ea typeface="Noto Sans CJK JP" pitchFamily="34" charset="-122"/>
-                <a:cs typeface="Noto Sans CJK JP" pitchFamily="34" charset="-120"/>
-              </a:rPr>
-              <a:t>→ A ・ B ・ C 案では共通して 20 年で 2,439 万円 の屋根メンテ費用が必ず発生 ( 塗装 4,000 円 / ㎡ + 昇降足場 30 万 + パネル脱着 63 万 × 物価高騰 6%/ 年 ×2 回 )</a:t>
+                  <a:srgbClr val="1A2B40"/>
+                </a:solidFill>
+                <a:latin typeface="Noto Sans CJK JP" pitchFamily="34" charset="0"/>
+                <a:ea typeface="Noto Sans CJK JP" pitchFamily="34" charset="-122"/>
+                <a:cs typeface="Noto Sans CJK JP" pitchFamily="34" charset="-120"/>
+              </a:rPr>
+              <a:t>1回あたり: 塗装(4,000円×2,900㎡=1,160万) + 全面足場(3,000円×1,800㎡=540万) + パネル脱着 63万 = 1,763万円(現価)</a:t>
             </a:r>
             <a:endParaRPr lang="en-US" sz="1050" dirty="0"/>
           </a:p>
@@ -9131,8 +9131,67 @@
         </p:nvSpPr>
         <p:spPr>
           <a:xfrm>
-            <a:off x="457200" y="5029200"/>
-            <a:ext cx="11274552" cy="1371600"/>
+            <a:off x="457200" y="5120640"/>
+            <a:ext cx="11274552" cy="548640"/>
+          </a:xfrm>
+          <a:prstGeom prst="rect">
+            <a:avLst/>
+          </a:prstGeom>
+          <a:solidFill>
+            <a:srgbClr val="C0392B"/>
+          </a:solidFill>
+          <a:ln/>
+        </p:spPr>
+      </p:sp>
+      <p:sp>
+        <p:nvSpPr>
+          <p:cNvPr id="23" name="Text 21"/>
+          <p:cNvSpPr/>
+          <p:nvPr/>
+        </p:nvSpPr>
+        <p:spPr>
+          <a:xfrm>
+            <a:off x="640080" y="5120640"/>
+            <a:ext cx="10972800" cy="548640"/>
+          </a:xfrm>
+          <a:prstGeom prst="rect">
+            <a:avLst/>
+          </a:prstGeom>
+          <a:noFill/>
+          <a:ln/>
+        </p:spPr>
+        <p:txBody>
+          <a:bodyPr wrap="square" lIns="0" tIns="0" rIns="0" bIns="0" rtlCol="0" anchor="ctr"/>
+          <a:lstStyle/>
+          <a:p>
+            <a:pPr algn="l" indent="0" marL="0">
+              <a:buNone/>
+            </a:pPr>
+            <a:r>
+              <a:rPr lang="en-US" sz="1300" b="1" dirty="0">
+                <a:solidFill>
+                  <a:srgbClr val="FFFFFF"/>
+                </a:solidFill>
+                <a:latin typeface="Noto Sans CJK JP" pitchFamily="34" charset="0"/>
+                <a:ea typeface="Noto Sans CJK JP" pitchFamily="34" charset="-122"/>
+                <a:cs typeface="Noto Sans CJK JP" pitchFamily="34" charset="-120"/>
+              </a:rPr>
+              <a:t>→ A・B・C 案では20年で 6,584 万円 のメンテ費用が必ず発生し、 ★暑さは1ミリも改善しない★</a:t>
+            </a:r>
+            <a:endParaRPr lang="en-US" sz="1300" dirty="0"/>
+          </a:p>
+        </p:txBody>
+      </p:sp>
+      <p:sp>
+        <p:nvSpPr>
+          <p:cNvPr id="24" name="Shape 22"/>
+          <p:cNvSpPr/>
+          <p:nvPr/>
+        </p:nvSpPr>
+        <p:spPr>
+          <a:xfrm>
+            <a:off x="457200" y="5760720"/>
+            <a:ext cx="11274552" cy="868680"/>
           </a:xfrm>
           <a:prstGeom prst="rect">
             <a:avLst/>
@@ -9145,13 +9204,13 @@
       </p:sp>
       <p:sp>
         <p:nvSpPr>
-          <p:cNvPr id="23" name="Text 21"/>
-          <p:cNvSpPr/>
-          <p:nvPr/>
-        </p:nvSpPr>
-        <p:spPr>
-          <a:xfrm>
-            <a:off x="640080" y="5102352"/>
+          <p:cNvPr id="25" name="Text 23"/>
+          <p:cNvSpPr/>
+          <p:nvPr/>
+        </p:nvSpPr>
+        <p:spPr>
+          <a:xfrm>
+            <a:off x="640080" y="5806440"/>
             <a:ext cx="10972800" cy="292608"/>
           </a:xfrm>
           <a:prstGeom prst="rect">
@@ -9176,7 +9235,7 @@
                 <a:ea typeface="Noto Sans CJK JP" pitchFamily="34" charset="-122"/>
                 <a:cs typeface="Noto Sans CJK JP" pitchFamily="34" charset="-120"/>
               </a:rPr>
-              <a:t>D 案：脱炭素化促進事業の補助金活用で「メンテ自体が無くなる」</a:t>
+              <a:t>D / E 案：脱炭素化促進事業の補助金活用で「メンテ自体が無くなる + 暑さも下がる」</a:t>
             </a:r>
             <a:endParaRPr lang="en-US" sz="1300" dirty="0"/>
           </a:p>
@@ -9184,14 +9243,14 @@
       </p:sp>
       <p:sp>
         <p:nvSpPr>
-          <p:cNvPr id="24" name="Text 22"/>
-          <p:cNvSpPr/>
-          <p:nvPr/>
-        </p:nvSpPr>
-        <p:spPr>
-          <a:xfrm>
-            <a:off x="685800" y="5440680"/>
-            <a:ext cx="10972800" cy="914400"/>
+          <p:cNvPr id="26" name="Text 24"/>
+          <p:cNvSpPr/>
+          <p:nvPr/>
+        </p:nvSpPr>
+        <p:spPr>
+          <a:xfrm>
+            <a:off x="685800" y="6080760"/>
+            <a:ext cx="10972800" cy="502920"/>
           </a:xfrm>
           <a:prstGeom prst="rect">
             <a:avLst/>
@@ -9211,7 +9270,7 @@
               <a:buChar char="●"/>
             </a:pPr>
             <a:r>
-              <a:rPr lang="en-US" sz="1050" dirty="0">
+              <a:rPr lang="en-US" sz="1000" dirty="0">
                 <a:solidFill>
                   <a:srgbClr val="0F2747"/>
                 </a:solidFill>
@@ -9219,9 +9278,9 @@
                 <a:ea typeface="Noto Sans CJK JP" pitchFamily="34" charset="-122"/>
                 <a:cs typeface="Noto Sans CJK JP" pitchFamily="34" charset="-120"/>
               </a:rPr>
-              <a:t>ポリウレア + 足場 2,840 万円 ( 税込 ) → 単独補助 1,291 万 / 上限後 実質 2,277 万円 ( 昇降足場は 1 回のみ・外壁含む )</a:t>
-            </a:r>
-            <a:endParaRPr lang="en-US" sz="1050" dirty="0"/>
+              <a:t>D 案: 屋根+外壁ポリウレア2,900㎡(税込2,840万) → 補助金▲1,000万 → 実質1,840万。20年で6,584万のメンテが0円に</a:t>
+            </a:r>
+            <a:endParaRPr lang="en-US" sz="1000" dirty="0"/>
           </a:p>
           <a:p>
             <a:pPr algn="l" marL="342900" indent="-342900">
@@ -9232,7 +9291,7 @@
               <a:buChar char="●"/>
             </a:pPr>
             <a:r>
-              <a:rPr lang="en-US" sz="1050" dirty="0">
+              <a:rPr lang="en-US" sz="1000" dirty="0">
                 <a:solidFill>
                   <a:srgbClr val="0F2747"/>
                 </a:solidFill>
@@ -9240,30 +9299,9 @@
                 <a:ea typeface="Noto Sans CJK JP" pitchFamily="34" charset="-122"/>
                 <a:cs typeface="Noto Sans CJK JP" pitchFamily="34" charset="-120"/>
               </a:rPr>
-              <a:t>20 年間、塗装工事 0 円 ( 脂肪族ポリウレア 防水 / 防錆 10 年保証・ 20 年以上耐候 )</a:t>
-            </a:r>
-            <a:endParaRPr lang="en-US" sz="1050" dirty="0"/>
-          </a:p>
-          <a:p>
-            <a:pPr algn="l" marL="342900" indent="-342900">
-              <a:spcAft>
-                <a:spcPts val="400"/>
-              </a:spcAft>
-              <a:buSzPct val="100000"/>
-              <a:buChar char="●"/>
-            </a:pPr>
-            <a:r>
-              <a:rPr lang="en-US" sz="1050" dirty="0">
-                <a:solidFill>
-                  <a:srgbClr val="0F2747"/>
-                </a:solidFill>
-                <a:latin typeface="Noto Sans CJK JP" pitchFamily="34" charset="0"/>
-                <a:ea typeface="Noto Sans CJK JP" pitchFamily="34" charset="-122"/>
-                <a:cs typeface="Noto Sans CJK JP" pitchFamily="34" charset="-120"/>
-              </a:rPr>
-              <a:t>屋根防水とポリウレアが一体施工のため、太陽光パネル脱着 0 円</a:t>
-            </a:r>
-            <a:endParaRPr lang="en-US" sz="1050" dirty="0"/>
+              <a:t>E 案: 今年屋根のみ施工し補助金1,000万、来年外壁施工で補助金930万追加 ★ 補助金を2回獲りに行く2段階作戦</a:t>
+            </a:r>
+            <a:endParaRPr lang="en-US" sz="1000" dirty="0"/>
           </a:p>
           <a:p>
             <a:pPr algn="l" marL="342900" indent="-342900">
@@ -9271,7 +9309,7 @@
               <a:buChar char="●"/>
             </a:pPr>
             <a:r>
-              <a:rPr lang="en-US" sz="1050" b="1" dirty="0">
+              <a:rPr lang="en-US" sz="1000" b="1" dirty="0">
                 <a:solidFill>
                   <a:srgbClr val="0F2747"/>
                 </a:solidFill>
@@ -9279,15 +9317,15 @@
                 <a:ea typeface="Noto Sans CJK JP" pitchFamily="34" charset="-122"/>
                 <a:cs typeface="Noto Sans CJK JP" pitchFamily="34" charset="-120"/>
               </a:rPr>
-              <a:t>★ 物価高騰下で 2,439 万円かかる屋根メンテが、 D プランでは 0 円 ( 外壁も同時にポリウレア化 )</a:t>
-            </a:r>
-            <a:endParaRPr lang="en-US" sz="1050" dirty="0"/>
-          </a:p>
-        </p:txBody>
-      </p:sp>
-      <p:sp>
-        <p:nvSpPr>
-          <p:cNvPr id="25" name="Text 23"/>
+              <a:t>加えて、屋根5%+窓25%=空調30%カット効果。 ★塗装にはない遮熱効果で電気代も下がる二重効果★</a:t>
+            </a:r>
+            <a:endParaRPr lang="en-US" sz="1000" dirty="0"/>
+          </a:p>
+        </p:txBody>
+      </p:sp>
+      <p:sp>
+        <p:nvSpPr>
+          <p:cNvPr id="27" name="Text 25"/>
           <p:cNvSpPr/>
           <p:nvPr/>
         </p:nvSpPr>
@@ -9326,7 +9364,7 @@
       </p:sp>
       <p:sp>
         <p:nvSpPr>
-          <p:cNvPr id="26" name="Text 24"/>
+          <p:cNvPr id="28" name="Text 26"/>
           <p:cNvSpPr/>
           <p:nvPr/>
         </p:nvSpPr>
@@ -22514,7 +22552,7 @@
                 <a:ea typeface="Noto Sans CJK JP" pitchFamily="34" charset="-122"/>
                 <a:cs typeface="Noto Sans CJK JP" pitchFamily="34" charset="-120"/>
               </a:rPr>
-              <a:t>20年累計 8,099万円</a:t>
+              <a:t>20年累計 12,244万円</a:t>
             </a:r>
             <a:endParaRPr lang="en-US" sz="880" dirty="0"/>
           </a:p>
@@ -22556,7 +22594,7 @@
                 <a:ea typeface="Noto Sans CJK JP" pitchFamily="34" charset="-122"/>
                 <a:cs typeface="Noto Sans CJK JP" pitchFamily="34" charset="-120"/>
               </a:rPr>
-              <a:t>屋根メンテ 2,439万 (2回)</a:t>
+              <a:t>塗装+足場 6,584万★</a:t>
             </a:r>
             <a:endParaRPr lang="en-US" sz="880" dirty="0"/>
           </a:p>
@@ -22598,7 +22636,7 @@
                 <a:ea typeface="Noto Sans CJK JP" pitchFamily="34" charset="-122"/>
                 <a:cs typeface="Noto Sans CJK JP" pitchFamily="34" charset="-120"/>
               </a:rPr>
-              <a:t>BCP対策なし</a:t>
+              <a:t>暑さ対策ならず</a:t>
             </a:r>
             <a:endParaRPr lang="en-US" sz="880" dirty="0"/>
           </a:p>
@@ -22817,7 +22855,7 @@
                 <a:ea typeface="Noto Sans CJK JP" pitchFamily="34" charset="-122"/>
                 <a:cs typeface="Noto Sans CJK JP" pitchFamily="34" charset="-120"/>
               </a:rPr>
-              <a:t>20年累計 6,810万円</a:t>
+              <a:t>20年累計 10,955万円</a:t>
             </a:r>
             <a:endParaRPr lang="en-US" sz="880" dirty="0"/>
           </a:p>
@@ -22901,7 +22939,7 @@
                 <a:ea typeface="Noto Sans CJK JP" pitchFamily="34" charset="-122"/>
                 <a:cs typeface="Noto Sans CJK JP" pitchFamily="34" charset="-120"/>
               </a:rPr>
-              <a:t>屋根メンテ 2,439万残る</a:t>
+              <a:t>塗装メンテ 6,584万残る</a:t>
             </a:r>
             <a:endParaRPr lang="en-US" sz="880" dirty="0"/>
           </a:p>
@@ -23120,7 +23158,7 @@
                 <a:ea typeface="Noto Sans CJK JP" pitchFamily="34" charset="-122"/>
                 <a:cs typeface="Noto Sans CJK JP" pitchFamily="34" charset="-120"/>
               </a:rPr>
-              <a:t>20年累計 5,676万円</a:t>
+              <a:t>20年累計 9,821万円</a:t>
             </a:r>
             <a:endParaRPr lang="en-US" sz="880" dirty="0"/>
           </a:p>
@@ -23204,7 +23242,7 @@
                 <a:ea typeface="Noto Sans CJK JP" pitchFamily="34" charset="-122"/>
                 <a:cs typeface="Noto Sans CJK JP" pitchFamily="34" charset="-120"/>
               </a:rPr>
-              <a:t>屋根メンテ 2,439万残る</a:t>
+              <a:t>塗装メンテ 6,584万残る</a:t>
             </a:r>
             <a:endParaRPr lang="en-US" sz="880" dirty="0"/>
           </a:p>
@@ -23444,7 +23482,7 @@
                 <a:ea typeface="Noto Sans CJK JP" pitchFamily="34" charset="-122"/>
                 <a:cs typeface="Noto Sans CJK JP" pitchFamily="34" charset="-120"/>
               </a:rPr>
-              <a:t>A比 ▲2,724万</a:t>
+              <a:t>A比 ▲6,869万 ★</a:t>
             </a:r>
             <a:endParaRPr lang="en-US" sz="880" dirty="0"/>
           </a:p>
@@ -23507,7 +23545,7 @@
                 <a:ea typeface="Noto Sans CJK JP" pitchFamily="34" charset="-122"/>
                 <a:cs typeface="Noto Sans CJK JP" pitchFamily="34" charset="-120"/>
               </a:rPr>
-              <a:t>屋根+外壁 20年メンテ0</a:t>
+              <a:t>20年メンテ 0円</a:t>
             </a:r>
             <a:endParaRPr lang="en-US" sz="880" dirty="0"/>
           </a:p>
@@ -23726,7 +23764,7 @@
                 <a:ea typeface="Noto Sans CJK JP" pitchFamily="34" charset="-122"/>
                 <a:cs typeface="Noto Sans CJK JP" pitchFamily="34" charset="-120"/>
               </a:rPr>
-              <a:t>20年累計 4,095〜5,223万</a:t>
+              <a:t>20年累計 4,095万円 ★最安</a:t>
             </a:r>
             <a:endParaRPr lang="en-US" sz="880" dirty="0"/>
           </a:p>
@@ -23747,7 +23785,7 @@
                 <a:ea typeface="Noto Sans CJK JP" pitchFamily="34" charset="-122"/>
                 <a:cs typeface="Noto Sans CJK JP" pitchFamily="34" charset="-120"/>
               </a:rPr>
-              <a:t>A比 ▲2,876〜▲4,004万 ★</a:t>
+              <a:t>A比 ▲8,149万</a:t>
             </a:r>
             <a:endParaRPr lang="en-US" sz="880" dirty="0"/>
           </a:p>
@@ -23810,7 +23848,7 @@
                 <a:ea typeface="Noto Sans CJK JP" pitchFamily="34" charset="-122"/>
                 <a:cs typeface="Noto Sans CJK JP" pitchFamily="34" charset="-120"/>
               </a:rPr>
-              <a:t>来年 外壁で1,000万再狙い</a:t>
+              <a:t>来年外壁で実質930万</a:t>
             </a:r>
             <a:endParaRPr lang="en-US" sz="880" dirty="0"/>
           </a:p>
@@ -23942,7 +23980,7 @@
                 <a:ea typeface="Noto Sans CJK JP" pitchFamily="34" charset="-122"/>
                 <a:cs typeface="Noto Sans CJK JP" pitchFamily="34" charset="-120"/>
               </a:rPr>
-              <a:t>D は20年確定で最安(A比▲2,724万)。 E は屋根のみ先行で投資を抑えつつ補助金を2年に分けて最大2,000万円狙う2段階作戦(A比▲2,876〜▲4,004万)。 末松社長のご判断ポイントは「一気にD」か「2年でE→外壁」か</a:t>
+              <a:t>D 案は20年確定で A比▲6,869万円お得。 E 案は屋根のみ先行で投資を抑えつつ補助金を2年で2回獲り、 A比▲8,149万円。 ★塗装は維持費かかっても暑さ対策にならない! ポリウレアは20年メンテ0円+遮熱で空調代も下がる二重効果</a:t>
             </a:r>
             <a:endParaRPr lang="en-US" sz="1050" dirty="0"/>
           </a:p>
